--- a/docs/AI-Security-Red-Team-Assessment.pptx
+++ b/docs/AI-Security-Red-Team-Assessment.pptx
@@ -9502,6 +9502,18 @@
               </a:rPr>
               <a:t>Attack 4 - Model Extraction </a:t>
             </a:r>
+            <a:r>
+              <a:rPr lang="en-US" sz="2200">
+                <a:solidFill>
+                  <a:srgbClr val="404155"/>
+                </a:solidFill>
+                <a:latin typeface="Nobile" pitchFamily="34" charset="0"/>
+                <a:ea typeface="Nobile" pitchFamily="34" charset="-122"/>
+                <a:cs typeface="Nobile" pitchFamily="34" charset="-120"/>
+                <a:sym typeface="+mn-ea"/>
+              </a:rPr>
+              <a:t>&amp; transfer attacks</a:t>
+            </a:r>
             <a:endParaRPr lang="en-US" sz="2200"/>
           </a:p>
         </p:txBody>
@@ -9624,7 +9636,7 @@
               <a:buNone/>
             </a:pPr>
             <a:r>
-              <a:rPr lang="en-US" sz="1100">
+              <a:rPr lang="en-US" sz="1400">
                 <a:solidFill>
                   <a:srgbClr val="404155"/>
                 </a:solidFill>
@@ -9632,9 +9644,32 @@
                 <a:ea typeface="Nobile" pitchFamily="34" charset="-122"/>
                 <a:cs typeface="Nobile" pitchFamily="34" charset="-120"/>
               </a:rPr>
-              <a:t>10,000 queries replicate 80% of model behavior—enables offline attacks</a:t>
+              <a:t>10,000 queries replicate 80% of model behavior—enables </a:t>
             </a:r>
-            <a:endParaRPr lang="en-US" sz="1100"/>
+            <a:r>
+              <a:rPr lang="en-US" sz="1400">
+                <a:solidFill>
+                  <a:srgbClr val="404155"/>
+                </a:solidFill>
+                <a:latin typeface="Nobile" pitchFamily="34" charset="0"/>
+                <a:ea typeface="Nobile" pitchFamily="34" charset="-122"/>
+                <a:cs typeface="Nobile" pitchFamily="34" charset="-120"/>
+                <a:sym typeface="+mn-ea"/>
+              </a:rPr>
+              <a:t>transfer </a:t>
+            </a:r>
+            <a:r>
+              <a:rPr lang="en-US" sz="1400">
+                <a:solidFill>
+                  <a:srgbClr val="404155"/>
+                </a:solidFill>
+                <a:latin typeface="Nobile" pitchFamily="34" charset="0"/>
+                <a:ea typeface="Nobile" pitchFamily="34" charset="-122"/>
+                <a:cs typeface="Nobile" pitchFamily="34" charset="-120"/>
+              </a:rPr>
+              <a:t>attacks</a:t>
+            </a:r>
+            <a:endParaRPr lang="en-US" sz="1400"/>
           </a:p>
         </p:txBody>
       </p:sp>
@@ -9757,7 +9792,7 @@
               <a:buChar char="​"/>
             </a:pPr>
             <a:r>
-              <a:rPr lang="en-US" sz="850">
+              <a:rPr lang="en-US" sz="1200">
                 <a:solidFill>
                   <a:srgbClr val="404155"/>
                 </a:solidFill>
@@ -9767,7 +9802,24 @@
               </a:rPr>
               <a:t>Victim parameters: 1,342,122</a:t>
             </a:r>
-            <a:endParaRPr lang="en-US" sz="850"/>
+            <a:endParaRPr lang="en-US" sz="1200">
+              <a:solidFill>
+                <a:srgbClr val="404155"/>
+              </a:solidFill>
+              <a:latin typeface="Nobile" pitchFamily="34" charset="0"/>
+              <a:ea typeface="Nobile" pitchFamily="34" charset="-122"/>
+              <a:cs typeface="Nobile" pitchFamily="34" charset="-120"/>
+            </a:endParaRPr>
+          </a:p>
+          <a:p>
+            <a:pPr marL="172720" indent="-172720" algn="l">
+              <a:lnSpc>
+                <a:spcPct val="106000"/>
+              </a:lnSpc>
+              <a:buSzTx/>
+              <a:buChar char="​"/>
+            </a:pPr>
+            <a:endParaRPr lang="en-US" sz="1200"/>
           </a:p>
         </p:txBody>
       </p:sp>
@@ -9900,7 +9952,7 @@
         </p:nvSpPr>
         <p:spPr>
           <a:xfrm>
-            <a:off x="661475" y="1462286"/>
+            <a:off x="661475" y="1505466"/>
             <a:ext cx="11478330" cy="143073"/>
           </a:xfrm>
           <a:prstGeom prst="rect">
@@ -10011,7 +10063,7 @@
               <a:buChar char="​"/>
             </a:pPr>
             <a:r>
-              <a:rPr lang="en-US" sz="850">
+              <a:rPr lang="en-US" sz="1200">
                 <a:solidFill>
                   <a:srgbClr val="404155"/>
                 </a:solidFill>
@@ -10021,7 +10073,7 @@
               </a:rPr>
               <a:t>Surrogate parameters: 620,810</a:t>
             </a:r>
-            <a:endParaRPr lang="en-US" sz="850"/>
+            <a:endParaRPr lang="en-US" sz="1200"/>
           </a:p>
         </p:txBody>
       </p:sp>
@@ -10033,7 +10085,7 @@
         </p:nvSpPr>
         <p:spPr>
           <a:xfrm>
-            <a:off x="661475" y="1477665"/>
+            <a:off x="661475" y="1520845"/>
             <a:ext cx="112214" cy="112216"/>
           </a:xfrm>
           <a:prstGeom prst="roundRect">
@@ -10154,7 +10206,7 @@
         </p:nvSpPr>
         <p:spPr>
           <a:xfrm>
-            <a:off x="661475" y="1705273"/>
+            <a:off x="660840" y="1804968"/>
             <a:ext cx="10868745" cy="280491"/>
           </a:xfrm>
           <a:prstGeom prst="rect">
@@ -10257,14 +10309,14 @@
             </a:lvl9pPr>
           </a:lstStyle>
           <a:p>
-            <a:pPr marL="0" indent="0" algn="l">
+            <a:pPr marL="0" indent="0" algn="ctr">
               <a:lnSpc>
                 <a:spcPct val="104000"/>
               </a:lnSpc>
               <a:buNone/>
             </a:pPr>
             <a:r>
-              <a:rPr lang="en-US" sz="1750">
+              <a:rPr lang="" altLang="en-US">
                 <a:solidFill>
                   <a:srgbClr val="1B1B27"/>
                 </a:solidFill>
@@ -10272,9 +10324,16 @@
                 <a:ea typeface="Alexandria" pitchFamily="34" charset="-122"/>
                 <a:cs typeface="Alexandria" pitchFamily="34" charset="-120"/>
               </a:rPr>
-              <a:t>Method: Knowledge distillation via API</a:t>
+              <a:t>It has 4steps</a:t>
             </a:r>
-            <a:endParaRPr lang="en-US" sz="1750"/>
+            <a:endParaRPr lang="" altLang="en-US">
+              <a:solidFill>
+                <a:srgbClr val="1B1B27"/>
+              </a:solidFill>
+              <a:latin typeface="Alexandria" pitchFamily="34" charset="0"/>
+              <a:ea typeface="Alexandria" pitchFamily="34" charset="-122"/>
+              <a:cs typeface="Alexandria" pitchFamily="34" charset="-120"/>
+            </a:endParaRPr>
           </a:p>
         </p:txBody>
       </p:sp>
@@ -10286,7 +10345,7 @@
         </p:nvSpPr>
         <p:spPr>
           <a:xfrm>
-            <a:off x="661475" y="2211884"/>
+            <a:off x="661475" y="2373809"/>
             <a:ext cx="10868745" cy="12700"/>
           </a:xfrm>
           <a:prstGeom prst="roundRect">
@@ -14147,7 +14206,7 @@
         </p:spPr>
         <p:txBody>
           <a:bodyPr wrap="square" lIns="0" tIns="0" rIns="0" bIns="0" rtlCol="0" anchor="t">
-            <a:normAutofit/>
+            <a:noAutofit/>
           </a:bodyPr>
           <a:lstStyle>
             <a:lvl1pPr marL="0" algn="l" defTabSz="914400" rtl="0" eaLnBrk="1" latinLnBrk="0" hangingPunct="1">
@@ -14250,7 +14309,7 @@
               <a:buChar char="•"/>
             </a:pPr>
             <a:r>
-              <a:rPr lang="en-US" sz="850">
+              <a:rPr lang="en-US" sz="1200">
                 <a:solidFill>
                   <a:srgbClr val="404155"/>
                 </a:solidFill>
@@ -14260,7 +14319,7 @@
               </a:rPr>
               <a:t>Intellectual property stolen</a:t>
             </a:r>
-            <a:endParaRPr lang="en-US" sz="850"/>
+            <a:endParaRPr lang="en-US" sz="1200"/>
           </a:p>
           <a:p>
             <a:pPr marL="172720" indent="-172720" algn="l">
@@ -14271,7 +14330,7 @@
               <a:buChar char="•"/>
             </a:pPr>
             <a:r>
-              <a:rPr lang="en-US" sz="850">
+              <a:rPr lang="en-US" sz="1200">
                 <a:solidFill>
                   <a:srgbClr val="404155"/>
                 </a:solidFill>
@@ -14281,7 +14340,14 @@
               </a:rPr>
               <a:t>Attacker gains gradient access (white-box capability from black-box starting point)</a:t>
             </a:r>
-            <a:endParaRPr lang="en-US" sz="850"/>
+            <a:endParaRPr lang="en-US" sz="1200">
+              <a:solidFill>
+                <a:srgbClr val="404155"/>
+              </a:solidFill>
+              <a:latin typeface="Nobile" pitchFamily="34" charset="0"/>
+              <a:ea typeface="Nobile" pitchFamily="34" charset="-122"/>
+              <a:cs typeface="Nobile" pitchFamily="34" charset="-120"/>
+            </a:endParaRPr>
           </a:p>
         </p:txBody>
       </p:sp>
@@ -14563,7 +14629,7 @@
               <a:buNone/>
             </a:pPr>
             <a:r>
-              <a:rPr lang="en-US" sz="3600">
+              <a:rPr lang="en-US" sz="2800">
                 <a:solidFill>
                   <a:srgbClr val="1B1B27"/>
                 </a:solidFill>
@@ -14571,9 +14637,31 @@
                 <a:ea typeface="Alexandria" pitchFamily="34" charset="-122"/>
                 <a:cs typeface="Alexandria" pitchFamily="34" charset="-120"/>
               </a:rPr>
-              <a:t>Black-box attacks rival white-box effectiveness—threat is practical</a:t>
+              <a:t>Black-box attacks rival white-box effectiveness </a:t>
             </a:r>
-            <a:endParaRPr lang="en-US" sz="3600"/>
+            <a:r>
+              <a:rPr lang="" altLang="en-US" sz="2800">
+                <a:solidFill>
+                  <a:srgbClr val="1B1B27"/>
+                </a:solidFill>
+                <a:latin typeface="Alexandria" pitchFamily="34" charset="0"/>
+                <a:ea typeface="Alexandria" pitchFamily="34" charset="-122"/>
+                <a:cs typeface="Alexandria" pitchFamily="34" charset="-120"/>
+              </a:rPr>
+              <a:t>But they are more </a:t>
+            </a:r>
+            <a:r>
+              <a:rPr lang="en-US" sz="2800">
+                <a:solidFill>
+                  <a:srgbClr val="1B1B27"/>
+                </a:solidFill>
+                <a:latin typeface="Alexandria" pitchFamily="34" charset="0"/>
+                <a:ea typeface="Alexandria" pitchFamily="34" charset="-122"/>
+                <a:cs typeface="Alexandria" pitchFamily="34" charset="-120"/>
+              </a:rPr>
+              <a:t>practical</a:t>
+            </a:r>
+            <a:endParaRPr lang="en-US" sz="2800"/>
           </a:p>
         </p:txBody>
       </p:sp>
@@ -16844,8 +16932,8 @@
         </p:nvSpPr>
         <p:spPr>
           <a:xfrm>
-            <a:off x="661475" y="1349573"/>
-            <a:ext cx="10868745" cy="2292548"/>
+            <a:off x="661670" y="1349375"/>
+            <a:ext cx="10868660" cy="918210"/>
           </a:xfrm>
           <a:prstGeom prst="rect">
             <a:avLst/>
@@ -16956,7 +17044,7 @@
               <a:buNone/>
             </a:pPr>
             <a:r>
-              <a:rPr lang="en-US" sz="4800">
+              <a:rPr lang="en-US" sz="2800">
                 <a:solidFill>
                   <a:srgbClr val="1B1B27"/>
                 </a:solidFill>
@@ -16966,7 +17054,7 @@
               </a:rPr>
               <a:t>Model has zero adversarial robustness by design—not trained to resist attacks</a:t>
             </a:r>
-            <a:endParaRPr lang="en-US" sz="4800"/>
+            <a:endParaRPr lang="en-US" sz="2800"/>
           </a:p>
         </p:txBody>
       </p:sp>
@@ -16978,7 +17066,7 @@
         </p:nvSpPr>
         <p:spPr>
           <a:xfrm>
-            <a:off x="661475" y="3891260"/>
+            <a:off x="661475" y="2267565"/>
             <a:ext cx="11478330" cy="274638"/>
           </a:xfrm>
           <a:prstGeom prst="rect">
@@ -17110,7 +17198,7 @@
         </p:nvSpPr>
         <p:spPr>
           <a:xfrm>
-            <a:off x="661475" y="4352727"/>
+            <a:off x="498280" y="2760782"/>
             <a:ext cx="5351329" cy="1958479"/>
           </a:xfrm>
           <a:prstGeom prst="roundRect">
@@ -17233,7 +17321,7 @@
         </p:nvSpPr>
         <p:spPr>
           <a:xfrm>
-            <a:off x="845025" y="4536281"/>
+            <a:off x="681830" y="2944336"/>
             <a:ext cx="4984228" cy="276920"/>
           </a:xfrm>
           <a:prstGeom prst="rect">
@@ -17365,7 +17453,7 @@
         </p:nvSpPr>
         <p:spPr>
           <a:xfrm>
-            <a:off x="845025" y="4912816"/>
+            <a:off x="681830" y="3320871"/>
             <a:ext cx="4984228" cy="1214834"/>
           </a:xfrm>
           <a:prstGeom prst="rect">
@@ -17542,7 +17630,7 @@
         </p:nvSpPr>
         <p:spPr>
           <a:xfrm>
-            <a:off x="6178892" y="4352727"/>
+            <a:off x="6015697" y="2760782"/>
             <a:ext cx="5351329" cy="1958479"/>
           </a:xfrm>
           <a:prstGeom prst="roundRect">
@@ -17665,7 +17753,7 @@
         </p:nvSpPr>
         <p:spPr>
           <a:xfrm>
-            <a:off x="6362442" y="4536281"/>
+            <a:off x="6199247" y="2944336"/>
             <a:ext cx="4984228" cy="276920"/>
           </a:xfrm>
           <a:prstGeom prst="rect">
@@ -17797,7 +17885,7 @@
         </p:nvSpPr>
         <p:spPr>
           <a:xfrm>
-            <a:off x="6362442" y="4912816"/>
+            <a:off x="6199247" y="3320871"/>
             <a:ext cx="4984228" cy="940197"/>
           </a:xfrm>
           <a:prstGeom prst="rect">
@@ -17963,6 +18051,947 @@
               <a:t>No anomaly scoring</a:t>
             </a:r>
             <a:endParaRPr lang="en-US" sz="1350"/>
+          </a:p>
+        </p:txBody>
+      </p:sp>
+      <p:sp>
+        <p:nvSpPr>
+          <p:cNvPr id="17" name="Shape 3"/>
+          <p:cNvSpPr/>
+          <p:nvPr/>
+        </p:nvSpPr>
+        <p:spPr>
+          <a:xfrm>
+            <a:off x="498475" y="4888230"/>
+            <a:ext cx="5351145" cy="1740535"/>
+          </a:xfrm>
+          <a:prstGeom prst="roundRect">
+            <a:avLst>
+              <a:gd name="adj" fmla="val 3800"/>
+            </a:avLst>
+          </a:prstGeom>
+          <a:solidFill>
+            <a:srgbClr val="D2DDF9"/>
+          </a:solidFill>
+          <a:ln w="6350">
+            <a:solidFill>
+              <a:srgbClr val="B8C3DF"/>
+            </a:solidFill>
+            <a:prstDash val="solid"/>
+          </a:ln>
+        </p:spPr>
+        <p:txBody>
+          <a:bodyPr/>
+          <a:lstStyle>
+            <a:lvl1pPr marL="0" algn="l" defTabSz="914400" rtl="0" eaLnBrk="1" latinLnBrk="0" hangingPunct="1">
+              <a:defRPr sz="1800" kern="1200">
+                <a:solidFill>
+                  <a:schemeClr val="tx1"/>
+                </a:solidFill>
+                <a:latin typeface="+mn-lt"/>
+                <a:ea typeface="+mn-ea"/>
+                <a:cs typeface="+mn-cs"/>
+              </a:defRPr>
+            </a:lvl1pPr>
+            <a:lvl2pPr marL="457200" algn="l" defTabSz="914400" rtl="0" eaLnBrk="1" latinLnBrk="0" hangingPunct="1">
+              <a:defRPr sz="1800" kern="1200">
+                <a:solidFill>
+                  <a:schemeClr val="tx1"/>
+                </a:solidFill>
+                <a:latin typeface="+mn-lt"/>
+                <a:ea typeface="+mn-ea"/>
+                <a:cs typeface="+mn-cs"/>
+              </a:defRPr>
+            </a:lvl2pPr>
+            <a:lvl3pPr marL="914400" algn="l" defTabSz="914400" rtl="0" eaLnBrk="1" latinLnBrk="0" hangingPunct="1">
+              <a:defRPr sz="1800" kern="1200">
+                <a:solidFill>
+                  <a:schemeClr val="tx1"/>
+                </a:solidFill>
+                <a:latin typeface="+mn-lt"/>
+                <a:ea typeface="+mn-ea"/>
+                <a:cs typeface="+mn-cs"/>
+              </a:defRPr>
+            </a:lvl3pPr>
+            <a:lvl4pPr marL="1371600" algn="l" defTabSz="914400" rtl="0" eaLnBrk="1" latinLnBrk="0" hangingPunct="1">
+              <a:defRPr sz="1800" kern="1200">
+                <a:solidFill>
+                  <a:schemeClr val="tx1"/>
+                </a:solidFill>
+                <a:latin typeface="+mn-lt"/>
+                <a:ea typeface="+mn-ea"/>
+                <a:cs typeface="+mn-cs"/>
+              </a:defRPr>
+            </a:lvl4pPr>
+            <a:lvl5pPr marL="1828800" algn="l" defTabSz="914400" rtl="0" eaLnBrk="1" latinLnBrk="0" hangingPunct="1">
+              <a:defRPr sz="1800" kern="1200">
+                <a:solidFill>
+                  <a:schemeClr val="tx1"/>
+                </a:solidFill>
+                <a:latin typeface="+mn-lt"/>
+                <a:ea typeface="+mn-ea"/>
+                <a:cs typeface="+mn-cs"/>
+              </a:defRPr>
+            </a:lvl5pPr>
+            <a:lvl6pPr marL="2286000" algn="l" defTabSz="914400" rtl="0" eaLnBrk="1" latinLnBrk="0" hangingPunct="1">
+              <a:defRPr sz="1800" kern="1200">
+                <a:solidFill>
+                  <a:schemeClr val="tx1"/>
+                </a:solidFill>
+                <a:latin typeface="+mn-lt"/>
+                <a:ea typeface="+mn-ea"/>
+                <a:cs typeface="+mn-cs"/>
+              </a:defRPr>
+            </a:lvl6pPr>
+            <a:lvl7pPr marL="2743200" algn="l" defTabSz="914400" rtl="0" eaLnBrk="1" latinLnBrk="0" hangingPunct="1">
+              <a:defRPr sz="1800" kern="1200">
+                <a:solidFill>
+                  <a:schemeClr val="tx1"/>
+                </a:solidFill>
+                <a:latin typeface="+mn-lt"/>
+                <a:ea typeface="+mn-ea"/>
+                <a:cs typeface="+mn-cs"/>
+              </a:defRPr>
+            </a:lvl7pPr>
+            <a:lvl8pPr marL="3200400" algn="l" defTabSz="914400" rtl="0" eaLnBrk="1" latinLnBrk="0" hangingPunct="1">
+              <a:defRPr sz="1800" kern="1200">
+                <a:solidFill>
+                  <a:schemeClr val="tx1"/>
+                </a:solidFill>
+                <a:latin typeface="+mn-lt"/>
+                <a:ea typeface="+mn-ea"/>
+                <a:cs typeface="+mn-cs"/>
+              </a:defRPr>
+            </a:lvl8pPr>
+            <a:lvl9pPr marL="3657600" algn="l" defTabSz="914400" rtl="0" eaLnBrk="1" latinLnBrk="0" hangingPunct="1">
+              <a:defRPr sz="1800" kern="1200">
+                <a:solidFill>
+                  <a:schemeClr val="tx1"/>
+                </a:solidFill>
+                <a:latin typeface="+mn-lt"/>
+                <a:ea typeface="+mn-ea"/>
+                <a:cs typeface="+mn-cs"/>
+              </a:defRPr>
+            </a:lvl9pPr>
+          </a:lstStyle>
+          <a:p/>
+        </p:txBody>
+      </p:sp>
+      <p:sp>
+        <p:nvSpPr>
+          <p:cNvPr id="18" name="Text 4"/>
+          <p:cNvSpPr/>
+          <p:nvPr/>
+        </p:nvSpPr>
+        <p:spPr>
+          <a:xfrm>
+            <a:off x="681830" y="5071586"/>
+            <a:ext cx="4984228" cy="276920"/>
+          </a:xfrm>
+          <a:prstGeom prst="rect">
+            <a:avLst/>
+          </a:prstGeom>
+          <a:noFill/>
+        </p:spPr>
+        <p:txBody>
+          <a:bodyPr wrap="none" lIns="0" tIns="0" rIns="0" bIns="0" rtlCol="0" anchor="t"/>
+          <a:lstStyle>
+            <a:lvl1pPr marL="0" algn="l" defTabSz="914400" rtl="0" eaLnBrk="1" latinLnBrk="0" hangingPunct="1">
+              <a:defRPr sz="1800" kern="1200">
+                <a:solidFill>
+                  <a:schemeClr val="tx1"/>
+                </a:solidFill>
+                <a:latin typeface="+mn-lt"/>
+                <a:ea typeface="+mn-ea"/>
+                <a:cs typeface="+mn-cs"/>
+              </a:defRPr>
+            </a:lvl1pPr>
+            <a:lvl2pPr marL="457200" algn="l" defTabSz="914400" rtl="0" eaLnBrk="1" latinLnBrk="0" hangingPunct="1">
+              <a:defRPr sz="1800" kern="1200">
+                <a:solidFill>
+                  <a:schemeClr val="tx1"/>
+                </a:solidFill>
+                <a:latin typeface="+mn-lt"/>
+                <a:ea typeface="+mn-ea"/>
+                <a:cs typeface="+mn-cs"/>
+              </a:defRPr>
+            </a:lvl2pPr>
+            <a:lvl3pPr marL="914400" algn="l" defTabSz="914400" rtl="0" eaLnBrk="1" latinLnBrk="0" hangingPunct="1">
+              <a:defRPr sz="1800" kern="1200">
+                <a:solidFill>
+                  <a:schemeClr val="tx1"/>
+                </a:solidFill>
+                <a:latin typeface="+mn-lt"/>
+                <a:ea typeface="+mn-ea"/>
+                <a:cs typeface="+mn-cs"/>
+              </a:defRPr>
+            </a:lvl3pPr>
+            <a:lvl4pPr marL="1371600" algn="l" defTabSz="914400" rtl="0" eaLnBrk="1" latinLnBrk="0" hangingPunct="1">
+              <a:defRPr sz="1800" kern="1200">
+                <a:solidFill>
+                  <a:schemeClr val="tx1"/>
+                </a:solidFill>
+                <a:latin typeface="+mn-lt"/>
+                <a:ea typeface="+mn-ea"/>
+                <a:cs typeface="+mn-cs"/>
+              </a:defRPr>
+            </a:lvl4pPr>
+            <a:lvl5pPr marL="1828800" algn="l" defTabSz="914400" rtl="0" eaLnBrk="1" latinLnBrk="0" hangingPunct="1">
+              <a:defRPr sz="1800" kern="1200">
+                <a:solidFill>
+                  <a:schemeClr val="tx1"/>
+                </a:solidFill>
+                <a:latin typeface="+mn-lt"/>
+                <a:ea typeface="+mn-ea"/>
+                <a:cs typeface="+mn-cs"/>
+              </a:defRPr>
+            </a:lvl5pPr>
+            <a:lvl6pPr marL="2286000" algn="l" defTabSz="914400" rtl="0" eaLnBrk="1" latinLnBrk="0" hangingPunct="1">
+              <a:defRPr sz="1800" kern="1200">
+                <a:solidFill>
+                  <a:schemeClr val="tx1"/>
+                </a:solidFill>
+                <a:latin typeface="+mn-lt"/>
+                <a:ea typeface="+mn-ea"/>
+                <a:cs typeface="+mn-cs"/>
+              </a:defRPr>
+            </a:lvl6pPr>
+            <a:lvl7pPr marL="2743200" algn="l" defTabSz="914400" rtl="0" eaLnBrk="1" latinLnBrk="0" hangingPunct="1">
+              <a:defRPr sz="1800" kern="1200">
+                <a:solidFill>
+                  <a:schemeClr val="tx1"/>
+                </a:solidFill>
+                <a:latin typeface="+mn-lt"/>
+                <a:ea typeface="+mn-ea"/>
+                <a:cs typeface="+mn-cs"/>
+              </a:defRPr>
+            </a:lvl7pPr>
+            <a:lvl8pPr marL="3200400" algn="l" defTabSz="914400" rtl="0" eaLnBrk="1" latinLnBrk="0" hangingPunct="1">
+              <a:defRPr sz="1800" kern="1200">
+                <a:solidFill>
+                  <a:schemeClr val="tx1"/>
+                </a:solidFill>
+                <a:latin typeface="+mn-lt"/>
+                <a:ea typeface="+mn-ea"/>
+                <a:cs typeface="+mn-cs"/>
+              </a:defRPr>
+            </a:lvl8pPr>
+            <a:lvl9pPr marL="3657600" algn="l" defTabSz="914400" rtl="0" eaLnBrk="1" latinLnBrk="0" hangingPunct="1">
+              <a:defRPr sz="1800" kern="1200">
+                <a:solidFill>
+                  <a:schemeClr val="tx1"/>
+                </a:solidFill>
+                <a:latin typeface="+mn-lt"/>
+                <a:ea typeface="+mn-ea"/>
+                <a:cs typeface="+mn-cs"/>
+              </a:defRPr>
+            </a:lvl9pPr>
+          </a:lstStyle>
+          <a:p>
+            <a:pPr marL="0" indent="0" algn="l">
+              <a:lnSpc>
+                <a:spcPct val="104000"/>
+              </a:lnSpc>
+              <a:buNone/>
+            </a:pPr>
+            <a:r>
+              <a:rPr lang="" altLang="en-US" sz="1700">
+                <a:solidFill>
+                  <a:srgbClr val="404155"/>
+                </a:solidFill>
+                <a:latin typeface="Alexandria" pitchFamily="34" charset="0"/>
+                <a:ea typeface="Alexandria" pitchFamily="34" charset="-122"/>
+                <a:cs typeface="Alexandria" pitchFamily="34" charset="-120"/>
+              </a:rPr>
+              <a:t>3</a:t>
+            </a:r>
+            <a:r>
+              <a:rPr lang="en-US" sz="1700">
+                <a:solidFill>
+                  <a:srgbClr val="404155"/>
+                </a:solidFill>
+                <a:latin typeface="Alexandria" pitchFamily="34" charset="0"/>
+                <a:ea typeface="Alexandria" pitchFamily="34" charset="-122"/>
+                <a:cs typeface="Alexandria" pitchFamily="34" charset="-120"/>
+              </a:rPr>
+              <a:t>. Overconfident Predictions</a:t>
+            </a:r>
+            <a:endParaRPr lang="en-US" sz="1700">
+              <a:solidFill>
+                <a:srgbClr val="404155"/>
+              </a:solidFill>
+              <a:latin typeface="Alexandria" pitchFamily="34" charset="0"/>
+              <a:ea typeface="Alexandria" pitchFamily="34" charset="-122"/>
+              <a:cs typeface="Alexandria" pitchFamily="34" charset="-120"/>
+            </a:endParaRPr>
+          </a:p>
+        </p:txBody>
+      </p:sp>
+      <p:sp>
+        <p:nvSpPr>
+          <p:cNvPr id="19" name="Text 5"/>
+          <p:cNvSpPr/>
+          <p:nvPr/>
+        </p:nvSpPr>
+        <p:spPr>
+          <a:xfrm>
+            <a:off x="681830" y="5448121"/>
+            <a:ext cx="4984228" cy="1214834"/>
+          </a:xfrm>
+          <a:prstGeom prst="rect">
+            <a:avLst/>
+          </a:prstGeom>
+          <a:noFill/>
+        </p:spPr>
+        <p:txBody>
+          <a:bodyPr wrap="square" lIns="0" tIns="0" rIns="0" bIns="0" rtlCol="0" anchor="t">
+            <a:normAutofit lnSpcReduction="20000"/>
+          </a:bodyPr>
+          <a:lstStyle>
+            <a:lvl1pPr marL="0" algn="l" defTabSz="914400" rtl="0" eaLnBrk="1" latinLnBrk="0" hangingPunct="1">
+              <a:defRPr sz="1800" kern="1200">
+                <a:solidFill>
+                  <a:schemeClr val="tx1"/>
+                </a:solidFill>
+                <a:latin typeface="+mn-lt"/>
+                <a:ea typeface="+mn-ea"/>
+                <a:cs typeface="+mn-cs"/>
+              </a:defRPr>
+            </a:lvl1pPr>
+            <a:lvl2pPr marL="457200" algn="l" defTabSz="914400" rtl="0" eaLnBrk="1" latinLnBrk="0" hangingPunct="1">
+              <a:defRPr sz="1800" kern="1200">
+                <a:solidFill>
+                  <a:schemeClr val="tx1"/>
+                </a:solidFill>
+                <a:latin typeface="+mn-lt"/>
+                <a:ea typeface="+mn-ea"/>
+                <a:cs typeface="+mn-cs"/>
+              </a:defRPr>
+            </a:lvl2pPr>
+            <a:lvl3pPr marL="914400" algn="l" defTabSz="914400" rtl="0" eaLnBrk="1" latinLnBrk="0" hangingPunct="1">
+              <a:defRPr sz="1800" kern="1200">
+                <a:solidFill>
+                  <a:schemeClr val="tx1"/>
+                </a:solidFill>
+                <a:latin typeface="+mn-lt"/>
+                <a:ea typeface="+mn-ea"/>
+                <a:cs typeface="+mn-cs"/>
+              </a:defRPr>
+            </a:lvl3pPr>
+            <a:lvl4pPr marL="1371600" algn="l" defTabSz="914400" rtl="0" eaLnBrk="1" latinLnBrk="0" hangingPunct="1">
+              <a:defRPr sz="1800" kern="1200">
+                <a:solidFill>
+                  <a:schemeClr val="tx1"/>
+                </a:solidFill>
+                <a:latin typeface="+mn-lt"/>
+                <a:ea typeface="+mn-ea"/>
+                <a:cs typeface="+mn-cs"/>
+              </a:defRPr>
+            </a:lvl4pPr>
+            <a:lvl5pPr marL="1828800" algn="l" defTabSz="914400" rtl="0" eaLnBrk="1" latinLnBrk="0" hangingPunct="1">
+              <a:defRPr sz="1800" kern="1200">
+                <a:solidFill>
+                  <a:schemeClr val="tx1"/>
+                </a:solidFill>
+                <a:latin typeface="+mn-lt"/>
+                <a:ea typeface="+mn-ea"/>
+                <a:cs typeface="+mn-cs"/>
+              </a:defRPr>
+            </a:lvl5pPr>
+            <a:lvl6pPr marL="2286000" algn="l" defTabSz="914400" rtl="0" eaLnBrk="1" latinLnBrk="0" hangingPunct="1">
+              <a:defRPr sz="1800" kern="1200">
+                <a:solidFill>
+                  <a:schemeClr val="tx1"/>
+                </a:solidFill>
+                <a:latin typeface="+mn-lt"/>
+                <a:ea typeface="+mn-ea"/>
+                <a:cs typeface="+mn-cs"/>
+              </a:defRPr>
+            </a:lvl6pPr>
+            <a:lvl7pPr marL="2743200" algn="l" defTabSz="914400" rtl="0" eaLnBrk="1" latinLnBrk="0" hangingPunct="1">
+              <a:defRPr sz="1800" kern="1200">
+                <a:solidFill>
+                  <a:schemeClr val="tx1"/>
+                </a:solidFill>
+                <a:latin typeface="+mn-lt"/>
+                <a:ea typeface="+mn-ea"/>
+                <a:cs typeface="+mn-cs"/>
+              </a:defRPr>
+            </a:lvl7pPr>
+            <a:lvl8pPr marL="3200400" algn="l" defTabSz="914400" rtl="0" eaLnBrk="1" latinLnBrk="0" hangingPunct="1">
+              <a:defRPr sz="1800" kern="1200">
+                <a:solidFill>
+                  <a:schemeClr val="tx1"/>
+                </a:solidFill>
+                <a:latin typeface="+mn-lt"/>
+                <a:ea typeface="+mn-ea"/>
+                <a:cs typeface="+mn-cs"/>
+              </a:defRPr>
+            </a:lvl8pPr>
+            <a:lvl9pPr marL="3657600" algn="l" defTabSz="914400" rtl="0" eaLnBrk="1" latinLnBrk="0" hangingPunct="1">
+              <a:defRPr sz="1800" kern="1200">
+                <a:solidFill>
+                  <a:schemeClr val="tx1"/>
+                </a:solidFill>
+                <a:latin typeface="+mn-lt"/>
+                <a:ea typeface="+mn-ea"/>
+                <a:cs typeface="+mn-cs"/>
+              </a:defRPr>
+            </a:lvl9pPr>
+          </a:lstStyle>
+          <a:p>
+            <a:pPr marL="274320" indent="-274320" algn="l">
+              <a:lnSpc>
+                <a:spcPct val="129000"/>
+              </a:lnSpc>
+              <a:buSzTx/>
+              <a:buChar char="•"/>
+            </a:pPr>
+            <a:r>
+              <a:rPr lang="en-US" sz="1350">
+                <a:solidFill>
+                  <a:srgbClr val="404155"/>
+                </a:solidFill>
+                <a:latin typeface="Nobile" pitchFamily="34" charset="0"/>
+                <a:ea typeface="Nobile" pitchFamily="34" charset="-122"/>
+                <a:cs typeface="Nobile" pitchFamily="34" charset="-120"/>
+              </a:rPr>
+              <a:t>Trained  High confidence without calibration makes the model overconfident and brittle</a:t>
+            </a:r>
+            <a:endParaRPr lang="en-US" sz="1350">
+              <a:solidFill>
+                <a:srgbClr val="404155"/>
+              </a:solidFill>
+              <a:latin typeface="Nobile" pitchFamily="34" charset="0"/>
+              <a:ea typeface="Nobile" pitchFamily="34" charset="-122"/>
+              <a:cs typeface="Nobile" pitchFamily="34" charset="-120"/>
+            </a:endParaRPr>
+          </a:p>
+          <a:p>
+            <a:pPr marL="274320" indent="-274320" algn="l">
+              <a:lnSpc>
+                <a:spcPct val="129000"/>
+              </a:lnSpc>
+              <a:buSzTx/>
+              <a:buChar char="•"/>
+            </a:pPr>
+            <a:endParaRPr lang="en-US" sz="1350">
+              <a:solidFill>
+                <a:srgbClr val="404155"/>
+              </a:solidFill>
+              <a:latin typeface="Nobile" pitchFamily="34" charset="0"/>
+              <a:ea typeface="Nobile" pitchFamily="34" charset="-122"/>
+              <a:cs typeface="Nobile" pitchFamily="34" charset="-120"/>
+            </a:endParaRPr>
+          </a:p>
+          <a:p>
+            <a:pPr marL="274320" indent="-274320" algn="l">
+              <a:lnSpc>
+                <a:spcPct val="129000"/>
+              </a:lnSpc>
+              <a:buSzTx/>
+              <a:buChar char="•"/>
+            </a:pPr>
+            <a:r>
+              <a:rPr lang="en-US" sz="1350">
+                <a:solidFill>
+                  <a:srgbClr val="404155"/>
+                </a:solidFill>
+                <a:latin typeface="Nobile" pitchFamily="34" charset="0"/>
+                <a:ea typeface="Nobile" pitchFamily="34" charset="-122"/>
+                <a:cs typeface="Nobile" pitchFamily="34" charset="-120"/>
+              </a:rPr>
+              <a:t>Small perturbations cause drastic confidence shifts</a:t>
+            </a:r>
+            <a:endParaRPr lang="en-US" sz="1350">
+              <a:solidFill>
+                <a:srgbClr val="404155"/>
+              </a:solidFill>
+              <a:latin typeface="Nobile" pitchFamily="34" charset="0"/>
+              <a:ea typeface="Nobile" pitchFamily="34" charset="-122"/>
+              <a:cs typeface="Nobile" pitchFamily="34" charset="-120"/>
+            </a:endParaRPr>
+          </a:p>
+          <a:p>
+            <a:pPr indent="0" algn="l">
+              <a:lnSpc>
+                <a:spcPct val="129000"/>
+              </a:lnSpc>
+              <a:buSzTx/>
+              <a:buNone/>
+            </a:pPr>
+            <a:endParaRPr lang="en-US" sz="1350"/>
+          </a:p>
+        </p:txBody>
+      </p:sp>
+      <p:sp>
+        <p:nvSpPr>
+          <p:cNvPr id="20" name="Shape 6"/>
+          <p:cNvSpPr/>
+          <p:nvPr/>
+        </p:nvSpPr>
+        <p:spPr>
+          <a:xfrm>
+            <a:off x="6015990" y="4888230"/>
+            <a:ext cx="5351145" cy="1700530"/>
+          </a:xfrm>
+          <a:prstGeom prst="roundRect">
+            <a:avLst>
+              <a:gd name="adj" fmla="val 3800"/>
+            </a:avLst>
+          </a:prstGeom>
+          <a:solidFill>
+            <a:srgbClr val="D2DDF9"/>
+          </a:solidFill>
+          <a:ln w="6350">
+            <a:solidFill>
+              <a:srgbClr val="B8C3DF"/>
+            </a:solidFill>
+            <a:prstDash val="solid"/>
+          </a:ln>
+        </p:spPr>
+        <p:txBody>
+          <a:bodyPr/>
+          <a:lstStyle>
+            <a:lvl1pPr marL="0" algn="l" defTabSz="914400" rtl="0" eaLnBrk="1" latinLnBrk="0" hangingPunct="1">
+              <a:defRPr sz="1800" kern="1200">
+                <a:solidFill>
+                  <a:schemeClr val="tx1"/>
+                </a:solidFill>
+                <a:latin typeface="+mn-lt"/>
+                <a:ea typeface="+mn-ea"/>
+                <a:cs typeface="+mn-cs"/>
+              </a:defRPr>
+            </a:lvl1pPr>
+            <a:lvl2pPr marL="457200" algn="l" defTabSz="914400" rtl="0" eaLnBrk="1" latinLnBrk="0" hangingPunct="1">
+              <a:defRPr sz="1800" kern="1200">
+                <a:solidFill>
+                  <a:schemeClr val="tx1"/>
+                </a:solidFill>
+                <a:latin typeface="+mn-lt"/>
+                <a:ea typeface="+mn-ea"/>
+                <a:cs typeface="+mn-cs"/>
+              </a:defRPr>
+            </a:lvl2pPr>
+            <a:lvl3pPr marL="914400" algn="l" defTabSz="914400" rtl="0" eaLnBrk="1" latinLnBrk="0" hangingPunct="1">
+              <a:defRPr sz="1800" kern="1200">
+                <a:solidFill>
+                  <a:schemeClr val="tx1"/>
+                </a:solidFill>
+                <a:latin typeface="+mn-lt"/>
+                <a:ea typeface="+mn-ea"/>
+                <a:cs typeface="+mn-cs"/>
+              </a:defRPr>
+            </a:lvl3pPr>
+            <a:lvl4pPr marL="1371600" algn="l" defTabSz="914400" rtl="0" eaLnBrk="1" latinLnBrk="0" hangingPunct="1">
+              <a:defRPr sz="1800" kern="1200">
+                <a:solidFill>
+                  <a:schemeClr val="tx1"/>
+                </a:solidFill>
+                <a:latin typeface="+mn-lt"/>
+                <a:ea typeface="+mn-ea"/>
+                <a:cs typeface="+mn-cs"/>
+              </a:defRPr>
+            </a:lvl4pPr>
+            <a:lvl5pPr marL="1828800" algn="l" defTabSz="914400" rtl="0" eaLnBrk="1" latinLnBrk="0" hangingPunct="1">
+              <a:defRPr sz="1800" kern="1200">
+                <a:solidFill>
+                  <a:schemeClr val="tx1"/>
+                </a:solidFill>
+                <a:latin typeface="+mn-lt"/>
+                <a:ea typeface="+mn-ea"/>
+                <a:cs typeface="+mn-cs"/>
+              </a:defRPr>
+            </a:lvl5pPr>
+            <a:lvl6pPr marL="2286000" algn="l" defTabSz="914400" rtl="0" eaLnBrk="1" latinLnBrk="0" hangingPunct="1">
+              <a:defRPr sz="1800" kern="1200">
+                <a:solidFill>
+                  <a:schemeClr val="tx1"/>
+                </a:solidFill>
+                <a:latin typeface="+mn-lt"/>
+                <a:ea typeface="+mn-ea"/>
+                <a:cs typeface="+mn-cs"/>
+              </a:defRPr>
+            </a:lvl6pPr>
+            <a:lvl7pPr marL="2743200" algn="l" defTabSz="914400" rtl="0" eaLnBrk="1" latinLnBrk="0" hangingPunct="1">
+              <a:defRPr sz="1800" kern="1200">
+                <a:solidFill>
+                  <a:schemeClr val="tx1"/>
+                </a:solidFill>
+                <a:latin typeface="+mn-lt"/>
+                <a:ea typeface="+mn-ea"/>
+                <a:cs typeface="+mn-cs"/>
+              </a:defRPr>
+            </a:lvl7pPr>
+            <a:lvl8pPr marL="3200400" algn="l" defTabSz="914400" rtl="0" eaLnBrk="1" latinLnBrk="0" hangingPunct="1">
+              <a:defRPr sz="1800" kern="1200">
+                <a:solidFill>
+                  <a:schemeClr val="tx1"/>
+                </a:solidFill>
+                <a:latin typeface="+mn-lt"/>
+                <a:ea typeface="+mn-ea"/>
+                <a:cs typeface="+mn-cs"/>
+              </a:defRPr>
+            </a:lvl8pPr>
+            <a:lvl9pPr marL="3657600" algn="l" defTabSz="914400" rtl="0" eaLnBrk="1" latinLnBrk="0" hangingPunct="1">
+              <a:defRPr sz="1800" kern="1200">
+                <a:solidFill>
+                  <a:schemeClr val="tx1"/>
+                </a:solidFill>
+                <a:latin typeface="+mn-lt"/>
+                <a:ea typeface="+mn-ea"/>
+                <a:cs typeface="+mn-cs"/>
+              </a:defRPr>
+            </a:lvl9pPr>
+          </a:lstStyle>
+          <a:p/>
+        </p:txBody>
+      </p:sp>
+      <p:sp>
+        <p:nvSpPr>
+          <p:cNvPr id="21" name="Text 7"/>
+          <p:cNvSpPr/>
+          <p:nvPr/>
+        </p:nvSpPr>
+        <p:spPr>
+          <a:xfrm>
+            <a:off x="6199247" y="5071586"/>
+            <a:ext cx="4984228" cy="276920"/>
+          </a:xfrm>
+          <a:prstGeom prst="rect">
+            <a:avLst/>
+          </a:prstGeom>
+          <a:noFill/>
+        </p:spPr>
+        <p:txBody>
+          <a:bodyPr wrap="none" lIns="0" tIns="0" rIns="0" bIns="0" rtlCol="0" anchor="t"/>
+          <a:lstStyle>
+            <a:lvl1pPr marL="0" algn="l" defTabSz="914400" rtl="0" eaLnBrk="1" latinLnBrk="0" hangingPunct="1">
+              <a:defRPr sz="1800" kern="1200">
+                <a:solidFill>
+                  <a:schemeClr val="tx1"/>
+                </a:solidFill>
+                <a:latin typeface="+mn-lt"/>
+                <a:ea typeface="+mn-ea"/>
+                <a:cs typeface="+mn-cs"/>
+              </a:defRPr>
+            </a:lvl1pPr>
+            <a:lvl2pPr marL="457200" algn="l" defTabSz="914400" rtl="0" eaLnBrk="1" latinLnBrk="0" hangingPunct="1">
+              <a:defRPr sz="1800" kern="1200">
+                <a:solidFill>
+                  <a:schemeClr val="tx1"/>
+                </a:solidFill>
+                <a:latin typeface="+mn-lt"/>
+                <a:ea typeface="+mn-ea"/>
+                <a:cs typeface="+mn-cs"/>
+              </a:defRPr>
+            </a:lvl2pPr>
+            <a:lvl3pPr marL="914400" algn="l" defTabSz="914400" rtl="0" eaLnBrk="1" latinLnBrk="0" hangingPunct="1">
+              <a:defRPr sz="1800" kern="1200">
+                <a:solidFill>
+                  <a:schemeClr val="tx1"/>
+                </a:solidFill>
+                <a:latin typeface="+mn-lt"/>
+                <a:ea typeface="+mn-ea"/>
+                <a:cs typeface="+mn-cs"/>
+              </a:defRPr>
+            </a:lvl3pPr>
+            <a:lvl4pPr marL="1371600" algn="l" defTabSz="914400" rtl="0" eaLnBrk="1" latinLnBrk="0" hangingPunct="1">
+              <a:defRPr sz="1800" kern="1200">
+                <a:solidFill>
+                  <a:schemeClr val="tx1"/>
+                </a:solidFill>
+                <a:latin typeface="+mn-lt"/>
+                <a:ea typeface="+mn-ea"/>
+                <a:cs typeface="+mn-cs"/>
+              </a:defRPr>
+            </a:lvl4pPr>
+            <a:lvl5pPr marL="1828800" algn="l" defTabSz="914400" rtl="0" eaLnBrk="1" latinLnBrk="0" hangingPunct="1">
+              <a:defRPr sz="1800" kern="1200">
+                <a:solidFill>
+                  <a:schemeClr val="tx1"/>
+                </a:solidFill>
+                <a:latin typeface="+mn-lt"/>
+                <a:ea typeface="+mn-ea"/>
+                <a:cs typeface="+mn-cs"/>
+              </a:defRPr>
+            </a:lvl5pPr>
+            <a:lvl6pPr marL="2286000" algn="l" defTabSz="914400" rtl="0" eaLnBrk="1" latinLnBrk="0" hangingPunct="1">
+              <a:defRPr sz="1800" kern="1200">
+                <a:solidFill>
+                  <a:schemeClr val="tx1"/>
+                </a:solidFill>
+                <a:latin typeface="+mn-lt"/>
+                <a:ea typeface="+mn-ea"/>
+                <a:cs typeface="+mn-cs"/>
+              </a:defRPr>
+            </a:lvl6pPr>
+            <a:lvl7pPr marL="2743200" algn="l" defTabSz="914400" rtl="0" eaLnBrk="1" latinLnBrk="0" hangingPunct="1">
+              <a:defRPr sz="1800" kern="1200">
+                <a:solidFill>
+                  <a:schemeClr val="tx1"/>
+                </a:solidFill>
+                <a:latin typeface="+mn-lt"/>
+                <a:ea typeface="+mn-ea"/>
+                <a:cs typeface="+mn-cs"/>
+              </a:defRPr>
+            </a:lvl7pPr>
+            <a:lvl8pPr marL="3200400" algn="l" defTabSz="914400" rtl="0" eaLnBrk="1" latinLnBrk="0" hangingPunct="1">
+              <a:defRPr sz="1800" kern="1200">
+                <a:solidFill>
+                  <a:schemeClr val="tx1"/>
+                </a:solidFill>
+                <a:latin typeface="+mn-lt"/>
+                <a:ea typeface="+mn-ea"/>
+                <a:cs typeface="+mn-cs"/>
+              </a:defRPr>
+            </a:lvl8pPr>
+            <a:lvl9pPr marL="3657600" algn="l" defTabSz="914400" rtl="0" eaLnBrk="1" latinLnBrk="0" hangingPunct="1">
+              <a:defRPr sz="1800" kern="1200">
+                <a:solidFill>
+                  <a:schemeClr val="tx1"/>
+                </a:solidFill>
+                <a:latin typeface="+mn-lt"/>
+                <a:ea typeface="+mn-ea"/>
+                <a:cs typeface="+mn-cs"/>
+              </a:defRPr>
+            </a:lvl9pPr>
+          </a:lstStyle>
+          <a:p>
+            <a:pPr marL="0" indent="0" algn="l">
+              <a:lnSpc>
+                <a:spcPct val="104000"/>
+              </a:lnSpc>
+              <a:buNone/>
+            </a:pPr>
+            <a:r>
+              <a:rPr lang="en-US" sz="1700">
+                <a:solidFill>
+                  <a:srgbClr val="404155"/>
+                </a:solidFill>
+                <a:latin typeface="Alexandria" pitchFamily="34" charset="0"/>
+                <a:ea typeface="Alexandria" pitchFamily="34" charset="-122"/>
+                <a:cs typeface="Alexandria" pitchFamily="34" charset="-120"/>
+              </a:rPr>
+              <a:t>2. Smooth Decision Boundaries</a:t>
+            </a:r>
+            <a:endParaRPr lang="en-US" sz="1700">
+              <a:solidFill>
+                <a:srgbClr val="404155"/>
+              </a:solidFill>
+              <a:latin typeface="Alexandria" pitchFamily="34" charset="0"/>
+              <a:ea typeface="Alexandria" pitchFamily="34" charset="-122"/>
+              <a:cs typeface="Alexandria" pitchFamily="34" charset="-120"/>
+            </a:endParaRPr>
+          </a:p>
+        </p:txBody>
+      </p:sp>
+      <p:sp>
+        <p:nvSpPr>
+          <p:cNvPr id="22" name="Text 8"/>
+          <p:cNvSpPr/>
+          <p:nvPr/>
+        </p:nvSpPr>
+        <p:spPr>
+          <a:xfrm>
+            <a:off x="6199247" y="5448121"/>
+            <a:ext cx="4984228" cy="940197"/>
+          </a:xfrm>
+          <a:prstGeom prst="rect">
+            <a:avLst/>
+          </a:prstGeom>
+          <a:noFill/>
+        </p:spPr>
+        <p:txBody>
+          <a:bodyPr wrap="square" lIns="0" tIns="0" rIns="0" bIns="0" rtlCol="0" anchor="t">
+            <a:normAutofit lnSpcReduction="20000"/>
+          </a:bodyPr>
+          <a:lstStyle>
+            <a:lvl1pPr marL="0" algn="l" defTabSz="914400" rtl="0" eaLnBrk="1" latinLnBrk="0" hangingPunct="1">
+              <a:defRPr sz="1800" kern="1200">
+                <a:solidFill>
+                  <a:schemeClr val="tx1"/>
+                </a:solidFill>
+                <a:latin typeface="+mn-lt"/>
+                <a:ea typeface="+mn-ea"/>
+                <a:cs typeface="+mn-cs"/>
+              </a:defRPr>
+            </a:lvl1pPr>
+            <a:lvl2pPr marL="457200" algn="l" defTabSz="914400" rtl="0" eaLnBrk="1" latinLnBrk="0" hangingPunct="1">
+              <a:defRPr sz="1800" kern="1200">
+                <a:solidFill>
+                  <a:schemeClr val="tx1"/>
+                </a:solidFill>
+                <a:latin typeface="+mn-lt"/>
+                <a:ea typeface="+mn-ea"/>
+                <a:cs typeface="+mn-cs"/>
+              </a:defRPr>
+            </a:lvl2pPr>
+            <a:lvl3pPr marL="914400" algn="l" defTabSz="914400" rtl="0" eaLnBrk="1" latinLnBrk="0" hangingPunct="1">
+              <a:defRPr sz="1800" kern="1200">
+                <a:solidFill>
+                  <a:schemeClr val="tx1"/>
+                </a:solidFill>
+                <a:latin typeface="+mn-lt"/>
+                <a:ea typeface="+mn-ea"/>
+                <a:cs typeface="+mn-cs"/>
+              </a:defRPr>
+            </a:lvl3pPr>
+            <a:lvl4pPr marL="1371600" algn="l" defTabSz="914400" rtl="0" eaLnBrk="1" latinLnBrk="0" hangingPunct="1">
+              <a:defRPr sz="1800" kern="1200">
+                <a:solidFill>
+                  <a:schemeClr val="tx1"/>
+                </a:solidFill>
+                <a:latin typeface="+mn-lt"/>
+                <a:ea typeface="+mn-ea"/>
+                <a:cs typeface="+mn-cs"/>
+              </a:defRPr>
+            </a:lvl4pPr>
+            <a:lvl5pPr marL="1828800" algn="l" defTabSz="914400" rtl="0" eaLnBrk="1" latinLnBrk="0" hangingPunct="1">
+              <a:defRPr sz="1800" kern="1200">
+                <a:solidFill>
+                  <a:schemeClr val="tx1"/>
+                </a:solidFill>
+                <a:latin typeface="+mn-lt"/>
+                <a:ea typeface="+mn-ea"/>
+                <a:cs typeface="+mn-cs"/>
+              </a:defRPr>
+            </a:lvl5pPr>
+            <a:lvl6pPr marL="2286000" algn="l" defTabSz="914400" rtl="0" eaLnBrk="1" latinLnBrk="0" hangingPunct="1">
+              <a:defRPr sz="1800" kern="1200">
+                <a:solidFill>
+                  <a:schemeClr val="tx1"/>
+                </a:solidFill>
+                <a:latin typeface="+mn-lt"/>
+                <a:ea typeface="+mn-ea"/>
+                <a:cs typeface="+mn-cs"/>
+              </a:defRPr>
+            </a:lvl6pPr>
+            <a:lvl7pPr marL="2743200" algn="l" defTabSz="914400" rtl="0" eaLnBrk="1" latinLnBrk="0" hangingPunct="1">
+              <a:defRPr sz="1800" kern="1200">
+                <a:solidFill>
+                  <a:schemeClr val="tx1"/>
+                </a:solidFill>
+                <a:latin typeface="+mn-lt"/>
+                <a:ea typeface="+mn-ea"/>
+                <a:cs typeface="+mn-cs"/>
+              </a:defRPr>
+            </a:lvl7pPr>
+            <a:lvl8pPr marL="3200400" algn="l" defTabSz="914400" rtl="0" eaLnBrk="1" latinLnBrk="0" hangingPunct="1">
+              <a:defRPr sz="1800" kern="1200">
+                <a:solidFill>
+                  <a:schemeClr val="tx1"/>
+                </a:solidFill>
+                <a:latin typeface="+mn-lt"/>
+                <a:ea typeface="+mn-ea"/>
+                <a:cs typeface="+mn-cs"/>
+              </a:defRPr>
+            </a:lvl8pPr>
+            <a:lvl9pPr marL="3657600" algn="l" defTabSz="914400" rtl="0" eaLnBrk="1" latinLnBrk="0" hangingPunct="1">
+              <a:defRPr sz="1800" kern="1200">
+                <a:solidFill>
+                  <a:schemeClr val="tx1"/>
+                </a:solidFill>
+                <a:latin typeface="+mn-lt"/>
+                <a:ea typeface="+mn-ea"/>
+                <a:cs typeface="+mn-cs"/>
+              </a:defRPr>
+            </a:lvl9pPr>
+          </a:lstStyle>
+          <a:p>
+            <a:pPr marL="274320" indent="-274320" algn="l">
+              <a:lnSpc>
+                <a:spcPct val="129000"/>
+              </a:lnSpc>
+              <a:buSzTx/>
+              <a:buChar char="•"/>
+            </a:pPr>
+            <a:r>
+              <a:rPr lang="en-US" sz="1350">
+                <a:solidFill>
+                  <a:srgbClr val="404155"/>
+                </a:solidFill>
+                <a:latin typeface="Nobile" pitchFamily="34" charset="0"/>
+                <a:ea typeface="Nobile" pitchFamily="34" charset="-122"/>
+                <a:cs typeface="Nobile" pitchFamily="34" charset="-120"/>
+              </a:rPr>
+              <a:t>Neural networks are differentiable everywhere</a:t>
+            </a:r>
+            <a:endParaRPr lang="en-US" sz="1350">
+              <a:solidFill>
+                <a:srgbClr val="404155"/>
+              </a:solidFill>
+              <a:latin typeface="Nobile" pitchFamily="34" charset="0"/>
+              <a:ea typeface="Nobile" pitchFamily="34" charset="-122"/>
+              <a:cs typeface="Nobile" pitchFamily="34" charset="-120"/>
+            </a:endParaRPr>
+          </a:p>
+          <a:p>
+            <a:pPr marL="274320" indent="-274320" algn="l">
+              <a:lnSpc>
+                <a:spcPct val="129000"/>
+              </a:lnSpc>
+              <a:buSzTx/>
+              <a:buChar char="•"/>
+            </a:pPr>
+            <a:r>
+              <a:rPr lang="en-US" sz="1350">
+                <a:solidFill>
+                  <a:srgbClr val="404155"/>
+                </a:solidFill>
+                <a:latin typeface="Nobile" pitchFamily="34" charset="0"/>
+                <a:ea typeface="Nobile" pitchFamily="34" charset="-122"/>
+                <a:cs typeface="Nobile" pitchFamily="34" charset="-120"/>
+              </a:rPr>
+              <a:t>Gradients point directly toward misclassification</a:t>
+            </a:r>
+            <a:endParaRPr lang="en-US" sz="1350">
+              <a:solidFill>
+                <a:srgbClr val="404155"/>
+              </a:solidFill>
+              <a:latin typeface="Nobile" pitchFamily="34" charset="0"/>
+              <a:ea typeface="Nobile" pitchFamily="34" charset="-122"/>
+              <a:cs typeface="Nobile" pitchFamily="34" charset="-120"/>
+            </a:endParaRPr>
+          </a:p>
+          <a:p>
+            <a:pPr marL="274320" indent="-274320" algn="l">
+              <a:lnSpc>
+                <a:spcPct val="129000"/>
+              </a:lnSpc>
+              <a:buSzTx/>
+              <a:buChar char="•"/>
+            </a:pPr>
+            <a:r>
+              <a:rPr lang="en-US" sz="1350">
+                <a:solidFill>
+                  <a:srgbClr val="404155"/>
+                </a:solidFill>
+                <a:latin typeface="Nobile" pitchFamily="34" charset="0"/>
+                <a:ea typeface="Nobile" pitchFamily="34" charset="-122"/>
+                <a:cs typeface="Nobile" pitchFamily="34" charset="-120"/>
+              </a:rPr>
+              <a:t>Smooth boundaries make gradient-based attacks effective </a:t>
+            </a:r>
+            <a:r>
+              <a:rPr lang="" altLang="en-US" sz="1350">
+                <a:solidFill>
+                  <a:srgbClr val="404155"/>
+                </a:solidFill>
+                <a:latin typeface="Nobile" pitchFamily="34" charset="0"/>
+                <a:ea typeface="Nobile" pitchFamily="34" charset="-122"/>
+                <a:cs typeface="Nobile" pitchFamily="34" charset="-120"/>
+              </a:rPr>
+              <a:t>(FGSM,PDG)</a:t>
+            </a:r>
+            <a:endParaRPr lang="" altLang="en-US" sz="1350">
+              <a:solidFill>
+                <a:srgbClr val="404155"/>
+              </a:solidFill>
+              <a:latin typeface="Nobile" pitchFamily="34" charset="0"/>
+              <a:ea typeface="Nobile" pitchFamily="34" charset="-122"/>
+              <a:cs typeface="Nobile" pitchFamily="34" charset="-120"/>
+            </a:endParaRPr>
           </a:p>
         </p:txBody>
       </p:sp>
@@ -19956,8 +20985,9 @@
                           <a:latin typeface="Nobile" pitchFamily="34" charset="0"/>
                           <a:ea typeface="Nobile" pitchFamily="34" charset="-122"/>
                           <a:cs typeface="Nobile" pitchFamily="34" charset="-120"/>
+                          <a:sym typeface="+mn-ea"/>
                         </a:rPr>
-                        <a:t>CRITICAL</a:t>
+                        <a:t>MEDIUM</a:t>
                       </a:r>
                       <a:endParaRPr lang="en-US" sz="900">
                         <a:latin typeface="Nobile" pitchFamily="34" charset="0"/>
@@ -20533,7 +21563,40 @@
                 <a:ea typeface="Nobile" pitchFamily="34" charset="-122"/>
                 <a:cs typeface="Nobile" pitchFamily="34" charset="-120"/>
               </a:rPr>
-              <a:t>Model extraction: Needs unlimited queries + full probabilities ✓</a:t>
+              <a:t>Model extraction: Needs </a:t>
+            </a:r>
+            <a:r>
+              <a:rPr lang="" altLang="en-US" sz="900">
+                <a:solidFill>
+                  <a:srgbClr val="404155"/>
+                </a:solidFill>
+                <a:latin typeface="Nobile" pitchFamily="34" charset="0"/>
+                <a:ea typeface="Nobile" pitchFamily="34" charset="-122"/>
+                <a:cs typeface="Nobile" pitchFamily="34" charset="-120"/>
+              </a:rPr>
+              <a:t>api</a:t>
+            </a:r>
+            <a:r>
+              <a:rPr lang="" altLang="en-US" sz="900">
+                <a:solidFill>
+                  <a:srgbClr val="404155"/>
+                </a:solidFill>
+                <a:latin typeface="Nobile" pitchFamily="34" charset="0"/>
+                <a:ea typeface="Nobile" pitchFamily="34" charset="-122"/>
+                <a:cs typeface="Nobile" pitchFamily="34" charset="-120"/>
+              </a:rPr>
+              <a:t> </a:t>
+            </a:r>
+            <a:r>
+              <a:rPr lang="en-US" sz="900">
+                <a:solidFill>
+                  <a:srgbClr val="404155"/>
+                </a:solidFill>
+                <a:latin typeface="Nobile" pitchFamily="34" charset="0"/>
+                <a:ea typeface="Nobile" pitchFamily="34" charset="-122"/>
+                <a:cs typeface="Nobile" pitchFamily="34" charset="-120"/>
+              </a:rPr>
+              <a:t>queries + full probabilities ✓</a:t>
             </a:r>
             <a:endParaRPr lang="en-US" sz="900"/>
           </a:p>
@@ -21021,7 +22084,7 @@
         </p:spPr>
         <p:txBody>
           <a:bodyPr wrap="square" lIns="0" tIns="0" rIns="0" bIns="0" rtlCol="0" anchor="t">
-            <a:normAutofit/>
+            <a:normAutofit lnSpcReduction="10000"/>
           </a:bodyPr>
           <a:lstStyle>
             <a:lvl1pPr marL="0" algn="l" defTabSz="914400" rtl="0" eaLnBrk="1" latinLnBrk="0" hangingPunct="1">
@@ -21132,7 +22195,82 @@
                 <a:ea typeface="Nobile" pitchFamily="34" charset="-122"/>
                 <a:cs typeface="Nobile" pitchFamily="34" charset="-120"/>
               </a:rPr>
-              <a:t>M-05: API Authentication</a:t>
+              <a:t>M-0</a:t>
+            </a:r>
+            <a:r>
+              <a:rPr lang="" altLang="en-US" sz="1450">
+                <a:solidFill>
+                  <a:srgbClr val="404155"/>
+                </a:solidFill>
+                <a:latin typeface="Nobile" pitchFamily="34" charset="0"/>
+                <a:ea typeface="Nobile" pitchFamily="34" charset="-122"/>
+                <a:cs typeface="Nobile" pitchFamily="34" charset="-120"/>
+              </a:rPr>
+              <a:t>1</a:t>
+            </a:r>
+            <a:r>
+              <a:rPr lang="en-US" sz="1450">
+                <a:solidFill>
+                  <a:srgbClr val="404155"/>
+                </a:solidFill>
+                <a:latin typeface="Nobile" pitchFamily="34" charset="0"/>
+                <a:ea typeface="Nobile" pitchFamily="34" charset="-122"/>
+                <a:cs typeface="Nobile" pitchFamily="34" charset="-120"/>
+              </a:rPr>
+              <a:t>: API Authentication</a:t>
+            </a:r>
+            <a:endParaRPr lang="en-US" sz="1450">
+              <a:solidFill>
+                <a:srgbClr val="404155"/>
+              </a:solidFill>
+              <a:latin typeface="Nobile" pitchFamily="34" charset="0"/>
+              <a:ea typeface="Nobile" pitchFamily="34" charset="-122"/>
+              <a:cs typeface="Nobile" pitchFamily="34" charset="-120"/>
+            </a:endParaRPr>
+          </a:p>
+          <a:p>
+            <a:pPr marL="294640" indent="-294640" algn="l">
+              <a:lnSpc>
+                <a:spcPct val="133000"/>
+              </a:lnSpc>
+              <a:buSzTx/>
+              <a:buChar char="•"/>
+            </a:pPr>
+            <a:r>
+              <a:rPr lang="en-US" sz="1450">
+                <a:solidFill>
+                  <a:srgbClr val="404155"/>
+                </a:solidFill>
+                <a:latin typeface="Nobile" pitchFamily="34" charset="0"/>
+                <a:ea typeface="Nobile" pitchFamily="34" charset="-122"/>
+                <a:cs typeface="Nobile" pitchFamily="34" charset="-120"/>
+                <a:sym typeface="+mn-ea"/>
+              </a:rPr>
+              <a:t>M-0</a:t>
+            </a:r>
+            <a:r>
+              <a:rPr lang="en-US" altLang="en-US" sz="1450">
+                <a:solidFill>
+                  <a:srgbClr val="404155"/>
+                </a:solidFill>
+                <a:latin typeface="Nobile" pitchFamily="34" charset="0"/>
+                <a:ea typeface="Nobile" pitchFamily="34" charset="-122"/>
+                <a:cs typeface="Nobile" pitchFamily="34" charset="-120"/>
+                <a:sym typeface="+mn-ea"/>
+              </a:rPr>
+              <a:t>2</a:t>
+            </a:r>
+            <a:r>
+              <a:rPr lang="en-US" sz="1450">
+                <a:solidFill>
+                  <a:srgbClr val="404155"/>
+                </a:solidFill>
+                <a:latin typeface="Nobile" pitchFamily="34" charset="0"/>
+                <a:ea typeface="Nobile" pitchFamily="34" charset="-122"/>
+                <a:cs typeface="Nobile" pitchFamily="34" charset="-120"/>
+                <a:sym typeface="+mn-ea"/>
+              </a:rPr>
+              <a:t>: Minimize Response Data</a:t>
             </a:r>
             <a:endParaRPr lang="en-US" sz="1450"/>
           </a:p>
@@ -21153,7 +22291,29 @@
                 <a:ea typeface="Nobile" pitchFamily="34" charset="-122"/>
                 <a:cs typeface="Nobile" pitchFamily="34" charset="-120"/>
               </a:rPr>
-              <a:t>M-06: Rate Limiting</a:t>
+              <a:t>M-0</a:t>
+            </a:r>
+            <a:r>
+              <a:rPr lang="" altLang="en-US" sz="1450">
+                <a:solidFill>
+                  <a:srgbClr val="404155"/>
+                </a:solidFill>
+                <a:latin typeface="Nobile" pitchFamily="34" charset="0"/>
+                <a:ea typeface="Nobile" pitchFamily="34" charset="-122"/>
+                <a:cs typeface="Nobile" pitchFamily="34" charset="-120"/>
+              </a:rPr>
+              <a:t>4</a:t>
+            </a:r>
+            <a:r>
+              <a:rPr lang="en-US" sz="1450">
+                <a:solidFill>
+                  <a:srgbClr val="404155"/>
+                </a:solidFill>
+                <a:latin typeface="Nobile" pitchFamily="34" charset="0"/>
+                <a:ea typeface="Nobile" pitchFamily="34" charset="-122"/>
+                <a:cs typeface="Nobile" pitchFamily="34" charset="-120"/>
+              </a:rPr>
+              <a:t>: Rate Limiting</a:t>
             </a:r>
             <a:endParaRPr lang="en-US" sz="1450"/>
           </a:p>
@@ -21174,20 +22334,10 @@
                 <a:ea typeface="Nobile" pitchFamily="34" charset="-122"/>
                 <a:cs typeface="Nobile" pitchFamily="34" charset="-120"/>
               </a:rPr>
-              <a:t>M-07: Minimize Response Data</a:t>
+              <a:t>M-0</a:t>
             </a:r>
-            <a:endParaRPr lang="en-US" sz="1450"/>
-          </a:p>
-          <a:p>
-            <a:pPr marL="294640" indent="-294640" algn="l">
-              <a:lnSpc>
-                <a:spcPct val="133000"/>
-              </a:lnSpc>
-              <a:buSzTx/>
-              <a:buChar char="•"/>
-            </a:pPr>
             <a:r>
-              <a:rPr lang="en-US" sz="1450">
+              <a:rPr lang="" altLang="en-US" sz="1450">
                 <a:solidFill>
                   <a:srgbClr val="404155"/>
                 </a:solidFill>
@@ -21195,7 +22345,18 @@
                 <a:ea typeface="Nobile" pitchFamily="34" charset="-122"/>
                 <a:cs typeface="Nobile" pitchFamily="34" charset="-120"/>
               </a:rPr>
-              <a:t>M-08: Remove Metadata Endpoint</a:t>
+              <a:t>3</a:t>
+            </a:r>
+            <a:r>
+              <a:rPr lang="en-US" sz="1450">
+                <a:solidFill>
+                  <a:srgbClr val="404155"/>
+                </a:solidFill>
+                <a:latin typeface="Nobile" pitchFamily="34" charset="0"/>
+                <a:ea typeface="Nobile" pitchFamily="34" charset="-122"/>
+                <a:cs typeface="Nobile" pitchFamily="34" charset="-120"/>
+              </a:rPr>
+              <a:t>: Remove Metadata Endpoint</a:t>
             </a:r>
             <a:endParaRPr lang="en-US" sz="1450"/>
           </a:p>
@@ -21330,7 +22491,29 @@
                 <a:ea typeface="Nobile" pitchFamily="34" charset="-122"/>
                 <a:cs typeface="Nobile" pitchFamily="34" charset="-120"/>
               </a:rPr>
-              <a:t>M-01: Adversarial Training</a:t>
+              <a:t>M-0</a:t>
+            </a:r>
+            <a:r>
+              <a:rPr lang="" altLang="en-US" sz="1450">
+                <a:solidFill>
+                  <a:srgbClr val="404155"/>
+                </a:solidFill>
+                <a:latin typeface="Nobile" pitchFamily="34" charset="0"/>
+                <a:ea typeface="Nobile" pitchFamily="34" charset="-122"/>
+                <a:cs typeface="Nobile" pitchFamily="34" charset="-120"/>
+              </a:rPr>
+              <a:t>5</a:t>
+            </a:r>
+            <a:r>
+              <a:rPr lang="en-US" sz="1450">
+                <a:solidFill>
+                  <a:srgbClr val="404155"/>
+                </a:solidFill>
+                <a:latin typeface="Nobile" pitchFamily="34" charset="0"/>
+                <a:ea typeface="Nobile" pitchFamily="34" charset="-122"/>
+                <a:cs typeface="Nobile" pitchFamily="34" charset="-120"/>
+              </a:rPr>
+              <a:t>: Comprehensive Logging</a:t>
             </a:r>
             <a:endParaRPr lang="en-US" sz="1450"/>
           </a:p>
@@ -21351,7 +22534,93 @@
                 <a:ea typeface="Nobile" pitchFamily="34" charset="-122"/>
                 <a:cs typeface="Nobile" pitchFamily="34" charset="-120"/>
               </a:rPr>
-              <a:t>M-09: Comprehensive Logging</a:t>
+              <a:t>M-</a:t>
+            </a:r>
+            <a:r>
+              <a:rPr lang="" altLang="en-US" sz="1450">
+                <a:solidFill>
+                  <a:srgbClr val="404155"/>
+                </a:solidFill>
+                <a:latin typeface="Nobile" pitchFamily="34" charset="0"/>
+                <a:ea typeface="Nobile" pitchFamily="34" charset="-122"/>
+                <a:cs typeface="Nobile" pitchFamily="34" charset="-120"/>
+              </a:rPr>
+              <a:t>0</a:t>
+            </a:r>
+            <a:r>
+              <a:rPr lang="" altLang="en-US" sz="1450">
+                <a:solidFill>
+                  <a:srgbClr val="404155"/>
+                </a:solidFill>
+                <a:latin typeface="Nobile" pitchFamily="34" charset="0"/>
+                <a:ea typeface="Nobile" pitchFamily="34" charset="-122"/>
+                <a:cs typeface="Nobile" pitchFamily="34" charset="-120"/>
+              </a:rPr>
+              <a:t>6</a:t>
+            </a:r>
+            <a:r>
+              <a:rPr lang="en-US" sz="1450">
+                <a:solidFill>
+                  <a:srgbClr val="404155"/>
+                </a:solidFill>
+                <a:latin typeface="Nobile" pitchFamily="34" charset="0"/>
+                <a:ea typeface="Nobile" pitchFamily="34" charset="-122"/>
+                <a:cs typeface="Nobile" pitchFamily="34" charset="-120"/>
+              </a:rPr>
+              <a:t>: Container Hardening</a:t>
+            </a:r>
+            <a:endParaRPr lang="en-US" sz="1450">
+              <a:solidFill>
+                <a:srgbClr val="404155"/>
+              </a:solidFill>
+              <a:latin typeface="Nobile" pitchFamily="34" charset="0"/>
+              <a:ea typeface="Nobile" pitchFamily="34" charset="-122"/>
+              <a:cs typeface="Nobile" pitchFamily="34" charset="-120"/>
+            </a:endParaRPr>
+          </a:p>
+          <a:p>
+            <a:pPr marL="294640" indent="-294640" algn="l">
+              <a:lnSpc>
+                <a:spcPct val="133000"/>
+              </a:lnSpc>
+              <a:buSzTx/>
+              <a:buChar char="•"/>
+            </a:pPr>
+            <a:r>
+              <a:rPr lang="en-US" sz="1450">
+                <a:solidFill>
+                  <a:srgbClr val="404155"/>
+                </a:solidFill>
+                <a:latin typeface="Nobile" pitchFamily="34" charset="0"/>
+                <a:ea typeface="Nobile" pitchFamily="34" charset="-122"/>
+                <a:cs typeface="Nobile" pitchFamily="34" charset="-120"/>
+                <a:sym typeface="+mn-ea"/>
+              </a:rPr>
+              <a:t>M-0</a:t>
+            </a:r>
+            <a:r>
+              <a:rPr lang="en-US" altLang="en-US" sz="1450">
+                <a:solidFill>
+                  <a:srgbClr val="404155"/>
+                </a:solidFill>
+                <a:latin typeface="Nobile" pitchFamily="34" charset="0"/>
+                <a:ea typeface="Nobile" pitchFamily="34" charset="-122"/>
+                <a:cs typeface="Nobile" pitchFamily="34" charset="-120"/>
+                <a:sym typeface="+mn-ea"/>
+              </a:rPr>
+              <a:t>7</a:t>
+            </a:r>
+            <a:r>
+              <a:rPr lang="en-US" sz="1450">
+                <a:solidFill>
+                  <a:srgbClr val="404155"/>
+                </a:solidFill>
+                <a:latin typeface="Nobile" pitchFamily="34" charset="0"/>
+                <a:ea typeface="Nobile" pitchFamily="34" charset="-122"/>
+                <a:cs typeface="Nobile" pitchFamily="34" charset="-120"/>
+                <a:sym typeface="+mn-ea"/>
+              </a:rPr>
+              <a:t>: Adversarial Training</a:t>
             </a:r>
             <a:endParaRPr lang="en-US" sz="1450"/>
           </a:p>
@@ -21363,17 +22632,6 @@
               <a:buSzTx/>
               <a:buChar char="•"/>
             </a:pPr>
-            <a:r>
-              <a:rPr lang="en-US" sz="1450">
-                <a:solidFill>
-                  <a:srgbClr val="404155"/>
-                </a:solidFill>
-                <a:latin typeface="Nobile" pitchFamily="34" charset="0"/>
-                <a:ea typeface="Nobile" pitchFamily="34" charset="-122"/>
-                <a:cs typeface="Nobile" pitchFamily="34" charset="-120"/>
-              </a:rPr>
-              <a:t>M-10: Container Hardening</a:t>
-            </a:r>
             <a:endParaRPr lang="en-US" sz="1450"/>
           </a:p>
         </p:txBody>
